--- a/public/certificados/FOR-CCR-006.r03_Modelo_de_Certificado.pptx
+++ b/public/certificados/FOR-CCR-006.r03_Modelo_de_Certificado.pptx
@@ -273,7 +273,7 @@
           <a:p>
             <a:fld id="{849AA1B3-8CAB-4A7A-9664-8DFB99A4C6CD}" type="datetimeFigureOut">
               <a:rPr lang="pt-BR" smtClean="0"/>
-              <a:t>19/05/2026</a:t>
+              <a:t>09/06/2026</a:t>
             </a:fld>
             <a:endParaRPr lang="pt-BR"/>
           </a:p>
@@ -443,7 +443,7 @@
           <a:p>
             <a:fld id="{849AA1B3-8CAB-4A7A-9664-8DFB99A4C6CD}" type="datetimeFigureOut">
               <a:rPr lang="pt-BR" smtClean="0"/>
-              <a:t>19/05/2026</a:t>
+              <a:t>09/06/2026</a:t>
             </a:fld>
             <a:endParaRPr lang="pt-BR"/>
           </a:p>
@@ -623,7 +623,7 @@
           <a:p>
             <a:fld id="{849AA1B3-8CAB-4A7A-9664-8DFB99A4C6CD}" type="datetimeFigureOut">
               <a:rPr lang="pt-BR" smtClean="0"/>
-              <a:t>19/05/2026</a:t>
+              <a:t>09/06/2026</a:t>
             </a:fld>
             <a:endParaRPr lang="pt-BR"/>
           </a:p>
@@ -793,7 +793,7 @@
           <a:p>
             <a:fld id="{849AA1B3-8CAB-4A7A-9664-8DFB99A4C6CD}" type="datetimeFigureOut">
               <a:rPr lang="pt-BR" smtClean="0"/>
-              <a:t>19/05/2026</a:t>
+              <a:t>09/06/2026</a:t>
             </a:fld>
             <a:endParaRPr lang="pt-BR"/>
           </a:p>
@@ -1039,7 +1039,7 @@
           <a:p>
             <a:fld id="{849AA1B3-8CAB-4A7A-9664-8DFB99A4C6CD}" type="datetimeFigureOut">
               <a:rPr lang="pt-BR" smtClean="0"/>
-              <a:t>19/05/2026</a:t>
+              <a:t>09/06/2026</a:t>
             </a:fld>
             <a:endParaRPr lang="pt-BR"/>
           </a:p>
@@ -1271,7 +1271,7 @@
           <a:p>
             <a:fld id="{849AA1B3-8CAB-4A7A-9664-8DFB99A4C6CD}" type="datetimeFigureOut">
               <a:rPr lang="pt-BR" smtClean="0"/>
-              <a:t>19/05/2026</a:t>
+              <a:t>09/06/2026</a:t>
             </a:fld>
             <a:endParaRPr lang="pt-BR"/>
           </a:p>
@@ -1638,7 +1638,7 @@
           <a:p>
             <a:fld id="{849AA1B3-8CAB-4A7A-9664-8DFB99A4C6CD}" type="datetimeFigureOut">
               <a:rPr lang="pt-BR" smtClean="0"/>
-              <a:t>19/05/2026</a:t>
+              <a:t>09/06/2026</a:t>
             </a:fld>
             <a:endParaRPr lang="pt-BR"/>
           </a:p>
@@ -1756,7 +1756,7 @@
           <a:p>
             <a:fld id="{849AA1B3-8CAB-4A7A-9664-8DFB99A4C6CD}" type="datetimeFigureOut">
               <a:rPr lang="pt-BR" smtClean="0"/>
-              <a:t>19/05/2026</a:t>
+              <a:t>09/06/2026</a:t>
             </a:fld>
             <a:endParaRPr lang="pt-BR"/>
           </a:p>
@@ -1851,7 +1851,7 @@
           <a:p>
             <a:fld id="{849AA1B3-8CAB-4A7A-9664-8DFB99A4C6CD}" type="datetimeFigureOut">
               <a:rPr lang="pt-BR" smtClean="0"/>
-              <a:t>19/05/2026</a:t>
+              <a:t>09/06/2026</a:t>
             </a:fld>
             <a:endParaRPr lang="pt-BR"/>
           </a:p>
@@ -2128,7 +2128,7 @@
           <a:p>
             <a:fld id="{849AA1B3-8CAB-4A7A-9664-8DFB99A4C6CD}" type="datetimeFigureOut">
               <a:rPr lang="pt-BR" smtClean="0"/>
-              <a:t>19/05/2026</a:t>
+              <a:t>09/06/2026</a:t>
             </a:fld>
             <a:endParaRPr lang="pt-BR"/>
           </a:p>
@@ -2385,7 +2385,7 @@
           <a:p>
             <a:fld id="{849AA1B3-8CAB-4A7A-9664-8DFB99A4C6CD}" type="datetimeFigureOut">
               <a:rPr lang="pt-BR" smtClean="0"/>
-              <a:t>19/05/2026</a:t>
+              <a:t>09/06/2026</a:t>
             </a:fld>
             <a:endParaRPr lang="pt-BR"/>
           </a:p>
@@ -2598,7 +2598,7 @@
           <a:p>
             <a:fld id="{849AA1B3-8CAB-4A7A-9664-8DFB99A4C6CD}" type="datetimeFigureOut">
               <a:rPr lang="pt-BR" smtClean="0"/>
-              <a:t>19/05/2026</a:t>
+              <a:t>09/06/2026</a:t>
             </a:fld>
             <a:endParaRPr lang="pt-BR"/>
           </a:p>
@@ -3049,53 +3049,6 @@
       </p:pic>
       <p:sp>
         <p:nvSpPr>
-          <p:cNvPr id="6" name="CaixaDeTexto 5">
-            <a:extLst>
-              <a:ext uri="{FF2B5EF4-FFF2-40B4-BE49-F238E27FC236}">
-                <a16:creationId xmlns:a16="http://schemas.microsoft.com/office/drawing/2014/main" id="{45621090-F92D-4016-D67D-628D80DBA7BF}"/>
-              </a:ext>
-            </a:extLst>
-          </p:cNvPr>
-          <p:cNvSpPr txBox="1"/>
-          <p:nvPr/>
-        </p:nvSpPr>
-        <p:spPr>
-          <a:xfrm>
-            <a:off x="1323975" y="6272288"/>
-            <a:ext cx="2157414" cy="338554"/>
-          </a:xfrm>
-          <a:prstGeom prst="rect">
-            <a:avLst/>
-          </a:prstGeom>
-          <a:noFill/>
-        </p:spPr>
-        <p:txBody>
-          <a:bodyPr wrap="square" rtlCol="0" anchor="t">
-            <a:spAutoFit/>
-          </a:bodyPr>
-          <a:lstStyle/>
-          <a:p>
-            <a:pPr algn="ctr"/>
-            <a:r>
-              <a:rPr lang="pt-BR" sz="800" dirty="0">
-                <a:latin typeface="Montserrat" pitchFamily="2" charset="-18"/>
-              </a:rPr>
-              <a:t>[Assinatura do responsável]​</a:t>
-            </a:r>
-          </a:p>
-          <a:p>
-            <a:pPr algn="ctr"/>
-            <a:r>
-              <a:rPr lang="pt-BR" sz="800" dirty="0">
-                <a:latin typeface="Montserrat" pitchFamily="2" charset="-18"/>
-              </a:rPr>
-              <a:t>[Cargo]</a:t>
-            </a:r>
-          </a:p>
-        </p:txBody>
-      </p:sp>
-      <p:sp>
-        <p:nvSpPr>
           <p:cNvPr id="7" name="CaixaDeTexto 6">
             <a:extLst>
               <a:ext uri="{FF2B5EF4-FFF2-40B4-BE49-F238E27FC236}">
@@ -3109,53 +3062,6 @@
         <p:spPr>
           <a:xfrm>
             <a:off x="4037646" y="6272288"/>
-            <a:ext cx="2157414" cy="338554"/>
-          </a:xfrm>
-          <a:prstGeom prst="rect">
-            <a:avLst/>
-          </a:prstGeom>
-          <a:noFill/>
-        </p:spPr>
-        <p:txBody>
-          <a:bodyPr wrap="square" rtlCol="0" anchor="t">
-            <a:spAutoFit/>
-          </a:bodyPr>
-          <a:lstStyle/>
-          <a:p>
-            <a:pPr algn="ctr"/>
-            <a:r>
-              <a:rPr lang="pt-BR" sz="800" dirty="0">
-                <a:latin typeface="Montserrat" pitchFamily="2" charset="-18"/>
-              </a:rPr>
-              <a:t>[Assinatura do responsável]​</a:t>
-            </a:r>
-          </a:p>
-          <a:p>
-            <a:pPr algn="ctr"/>
-            <a:r>
-              <a:rPr lang="pt-BR" sz="800" dirty="0">
-                <a:latin typeface="Montserrat" pitchFamily="2" charset="-18"/>
-              </a:rPr>
-              <a:t>[Cargo]</a:t>
-            </a:r>
-          </a:p>
-        </p:txBody>
-      </p:sp>
-      <p:sp>
-        <p:nvSpPr>
-          <p:cNvPr id="8" name="CaixaDeTexto 7">
-            <a:extLst>
-              <a:ext uri="{FF2B5EF4-FFF2-40B4-BE49-F238E27FC236}">
-                <a16:creationId xmlns:a16="http://schemas.microsoft.com/office/drawing/2014/main" id="{E6079031-44F1-E63F-71D3-79447B417EEA}"/>
-              </a:ext>
-            </a:extLst>
-          </p:cNvPr>
-          <p:cNvSpPr txBox="1"/>
-          <p:nvPr/>
-        </p:nvSpPr>
-        <p:spPr>
-          <a:xfrm>
-            <a:off x="6751317" y="6272288"/>
             <a:ext cx="2157414" cy="338554"/>
           </a:xfrm>
           <a:prstGeom prst="rect">
@@ -3413,6 +3319,74 @@
               </a:rPr>
               <a:t>São Luís, [00] de [Janeiro] de 2026.</a:t>
             </a:r>
+          </a:p>
+        </p:txBody>
+      </p:sp>
+      <p:sp>
+        <p:nvSpPr>
+          <p:cNvPr id="3" name="CaixaDeTexto 2">
+            <a:extLst>
+              <a:ext uri="{FF2B5EF4-FFF2-40B4-BE49-F238E27FC236}">
+                <a16:creationId xmlns:a16="http://schemas.microsoft.com/office/drawing/2014/main" id="{47CC0341-9CCF-E1C4-F238-F24CCFA02190}"/>
+              </a:ext>
+            </a:extLst>
+          </p:cNvPr>
+          <p:cNvSpPr txBox="1"/>
+          <p:nvPr/>
+        </p:nvSpPr>
+        <p:spPr>
+          <a:xfrm>
+            <a:off x="1150374" y="6072233"/>
+            <a:ext cx="2458065" cy="369332"/>
+          </a:xfrm>
+          <a:prstGeom prst="rect">
+            <a:avLst/>
+          </a:prstGeom>
+          <a:solidFill>
+            <a:schemeClr val="bg1"/>
+          </a:solidFill>
+        </p:spPr>
+        <p:txBody>
+          <a:bodyPr wrap="square" rtlCol="0">
+            <a:spAutoFit/>
+          </a:bodyPr>
+          <a:lstStyle/>
+          <a:p>
+            <a:endParaRPr lang="pt-BR" dirty="0"/>
+          </a:p>
+        </p:txBody>
+      </p:sp>
+      <p:sp>
+        <p:nvSpPr>
+          <p:cNvPr id="5" name="CaixaDeTexto 4">
+            <a:extLst>
+              <a:ext uri="{FF2B5EF4-FFF2-40B4-BE49-F238E27FC236}">
+                <a16:creationId xmlns:a16="http://schemas.microsoft.com/office/drawing/2014/main" id="{5B166CC8-E885-C879-C5BE-85EECD5AEF66}"/>
+              </a:ext>
+            </a:extLst>
+          </p:cNvPr>
+          <p:cNvSpPr txBox="1"/>
+          <p:nvPr/>
+        </p:nvSpPr>
+        <p:spPr>
+          <a:xfrm>
+            <a:off x="6624267" y="6044692"/>
+            <a:ext cx="2458065" cy="369332"/>
+          </a:xfrm>
+          <a:prstGeom prst="rect">
+            <a:avLst/>
+          </a:prstGeom>
+          <a:solidFill>
+            <a:schemeClr val="bg1"/>
+          </a:solidFill>
+        </p:spPr>
+        <p:txBody>
+          <a:bodyPr wrap="square" rtlCol="0">
+            <a:spAutoFit/>
+          </a:bodyPr>
+          <a:lstStyle/>
+          <a:p>
+            <a:endParaRPr lang="pt-BR" dirty="0"/>
           </a:p>
         </p:txBody>
       </p:sp>
